--- a/m5/diapositivos/sessao-11-m5-f15.pptx
+++ b/m5/diapositivos/sessao-11-m5-f15.pptx
@@ -1971,7 +1971,75 @@
                 <a:ea typeface="Arial" pitchFamily="34" charset="-122"/>
                 <a:cs typeface="Arial" pitchFamily="34" charset="-120"/>
               </a:rPr>
-              <a:t>Esta lição revê o módulo inteiro: o Romantismo de Camilo em Amor de Perdição (1862) frente ao Realismo de Eça em Os Maias (1888).</a:t>
+              <a:t>Esta lição revê o módulo inteiro: o Romantismo de Camilo em </a:t>
+            </a:r>
+            <a:pPr indent="0" marL="0">
+              <a:lnSpc>
+                <a:spcPct val="105000"/>
+              </a:lnSpc>
+              <a:buNone/>
+            </a:pPr>
+            <a:r>
+              <a:rPr lang="en-US" sz="2200" i="1" dirty="0">
+                <a:solidFill>
+                  <a:srgbClr val="F2F0EA"/>
+                </a:solidFill>
+                <a:latin typeface="Arial" pitchFamily="34" charset="0"/>
+                <a:ea typeface="Arial" pitchFamily="34" charset="-122"/>
+                <a:cs typeface="Arial" pitchFamily="34" charset="-120"/>
+              </a:rPr>
+              <a:t>Amor de Perdição</a:t>
+            </a:r>
+            <a:pPr indent="0" marL="0">
+              <a:lnSpc>
+                <a:spcPct val="105000"/>
+              </a:lnSpc>
+              <a:buNone/>
+            </a:pPr>
+            <a:r>
+              <a:rPr lang="en-US" sz="2200" dirty="0">
+                <a:solidFill>
+                  <a:srgbClr val="F2F0EA"/>
+                </a:solidFill>
+                <a:latin typeface="Arial" pitchFamily="34" charset="0"/>
+                <a:ea typeface="Arial" pitchFamily="34" charset="-122"/>
+                <a:cs typeface="Arial" pitchFamily="34" charset="-120"/>
+              </a:rPr>
+              <a:t> (1862) frente ao Realismo de Eça em </a:t>
+            </a:r>
+            <a:pPr indent="0" marL="0">
+              <a:lnSpc>
+                <a:spcPct val="105000"/>
+              </a:lnSpc>
+              <a:buNone/>
+            </a:pPr>
+            <a:r>
+              <a:rPr lang="en-US" sz="2200" i="1" dirty="0">
+                <a:solidFill>
+                  <a:srgbClr val="F2F0EA"/>
+                </a:solidFill>
+                <a:latin typeface="Arial" pitchFamily="34" charset="0"/>
+                <a:ea typeface="Arial" pitchFamily="34" charset="-122"/>
+                <a:cs typeface="Arial" pitchFamily="34" charset="-120"/>
+              </a:rPr>
+              <a:t>Os Maias</a:t>
+            </a:r>
+            <a:pPr indent="0" marL="0">
+              <a:lnSpc>
+                <a:spcPct val="105000"/>
+              </a:lnSpc>
+              <a:buNone/>
+            </a:pPr>
+            <a:r>
+              <a:rPr lang="en-US" sz="2200" dirty="0">
+                <a:solidFill>
+                  <a:srgbClr val="F2F0EA"/>
+                </a:solidFill>
+                <a:latin typeface="Arial" pitchFamily="34" charset="0"/>
+                <a:ea typeface="Arial" pitchFamily="34" charset="-122"/>
+                <a:cs typeface="Arial" pitchFamily="34" charset="-120"/>
+              </a:rPr>
+              <a:t> (1888).</a:t>
             </a:r>
             <a:endParaRPr lang="en-US" sz="2200" dirty="0"/>
           </a:p>
@@ -2545,6 +2613,20 @@
                         <a:buNone/>
                       </a:pPr>
                       <a:r>
+                        <a:rPr lang="en-US" sz="1100" b="1" i="1" spc="150" kern="0" dirty="0">
+                          <a:solidFill>
+                            <a:srgbClr val="A9A79F"/>
+                          </a:solidFill>
+                          <a:latin typeface="Arial" pitchFamily="34" charset="0"/>
+                          <a:ea typeface="Arial" pitchFamily="34" charset="-122"/>
+                          <a:cs typeface="Arial" pitchFamily="34" charset="-120"/>
+                        </a:rPr>
+                        <a:t>AMOR DE PERDIÇÃO</a:t>
+                      </a:r>
+                      <a:pPr indent="0" marL="0">
+                        <a:buNone/>
+                      </a:pPr>
+                      <a:r>
                         <a:rPr lang="en-US" sz="1100" b="1" spc="150" kern="0" dirty="0">
                           <a:solidFill>
                             <a:srgbClr val="A9A79F"/>
@@ -2553,7 +2635,7 @@
                           <a:ea typeface="Arial" pitchFamily="34" charset="-122"/>
                           <a:cs typeface="Arial" pitchFamily="34" charset="-120"/>
                         </a:rPr>
-                        <a:t>AMOR DE PERDIÇÃO (1862)</a:t>
+                        <a:t> (1862)</a:t>
                       </a:r>
                       <a:endParaRPr lang="en-US" sz="1100" dirty="0">
                         <a:latin typeface="Arial" charset="0"/>
@@ -2595,6 +2677,20 @@
                         <a:buNone/>
                       </a:pPr>
                       <a:r>
+                        <a:rPr lang="en-US" sz="1100" b="1" i="1" spc="150" kern="0" dirty="0">
+                          <a:solidFill>
+                            <a:srgbClr val="A9A79F"/>
+                          </a:solidFill>
+                          <a:latin typeface="Arial" pitchFamily="34" charset="0"/>
+                          <a:ea typeface="Arial" pitchFamily="34" charset="-122"/>
+                          <a:cs typeface="Arial" pitchFamily="34" charset="-120"/>
+                        </a:rPr>
+                        <a:t>OS MAIAS</a:t>
+                      </a:r>
+                      <a:pPr indent="0" marL="0">
+                        <a:buNone/>
+                      </a:pPr>
+                      <a:r>
                         <a:rPr lang="en-US" sz="1100" b="1" spc="150" kern="0" dirty="0">
                           <a:solidFill>
                             <a:srgbClr val="A9A79F"/>
@@ -2603,7 +2699,7 @@
                           <a:ea typeface="Arial" pitchFamily="34" charset="-122"/>
                           <a:cs typeface="Arial" pitchFamily="34" charset="-120"/>
                         </a:rPr>
-                        <a:t>OS MAIAS (1888)</a:t>
+                        <a:t> (1888)</a:t>
                       </a:r>
                       <a:endParaRPr lang="en-US" sz="1100" dirty="0">
                         <a:latin typeface="Arial" charset="0"/>
@@ -5184,7 +5280,75 @@
                 <a:ea typeface="Arial" pitchFamily="34" charset="-122"/>
                 <a:cs typeface="Arial" pitchFamily="34" charset="-120"/>
               </a:rPr>
-              <a:t>Em Amor de Perdição, o amor-paixão absoluto leva Teresa, Simão e Mariana à morte; em Os Maias, a ironia desmonta a paixão, Afonso morre e Carlos e Ega concluem «Falhámos a vida».</a:t>
+              <a:t>Em </a:t>
+            </a:r>
+            <a:pPr indent="0" marL="0">
+              <a:lnSpc>
+                <a:spcPct val="105000"/>
+              </a:lnSpc>
+              <a:buNone/>
+            </a:pPr>
+            <a:r>
+              <a:rPr lang="en-US" sz="2200" i="1" dirty="0">
+                <a:solidFill>
+                  <a:srgbClr val="F2F0EA"/>
+                </a:solidFill>
+                <a:latin typeface="Arial" pitchFamily="34" charset="0"/>
+                <a:ea typeface="Arial" pitchFamily="34" charset="-122"/>
+                <a:cs typeface="Arial" pitchFamily="34" charset="-120"/>
+              </a:rPr>
+              <a:t>Amor de Perdição</a:t>
+            </a:r>
+            <a:pPr indent="0" marL="0">
+              <a:lnSpc>
+                <a:spcPct val="105000"/>
+              </a:lnSpc>
+              <a:buNone/>
+            </a:pPr>
+            <a:r>
+              <a:rPr lang="en-US" sz="2200" dirty="0">
+                <a:solidFill>
+                  <a:srgbClr val="F2F0EA"/>
+                </a:solidFill>
+                <a:latin typeface="Arial" pitchFamily="34" charset="0"/>
+                <a:ea typeface="Arial" pitchFamily="34" charset="-122"/>
+                <a:cs typeface="Arial" pitchFamily="34" charset="-120"/>
+              </a:rPr>
+              <a:t>, o amor-paixão absoluto leva Teresa, Simão e Mariana à morte; em </a:t>
+            </a:r>
+            <a:pPr indent="0" marL="0">
+              <a:lnSpc>
+                <a:spcPct val="105000"/>
+              </a:lnSpc>
+              <a:buNone/>
+            </a:pPr>
+            <a:r>
+              <a:rPr lang="en-US" sz="2200" i="1" dirty="0">
+                <a:solidFill>
+                  <a:srgbClr val="F2F0EA"/>
+                </a:solidFill>
+                <a:latin typeface="Arial" pitchFamily="34" charset="0"/>
+                <a:ea typeface="Arial" pitchFamily="34" charset="-122"/>
+                <a:cs typeface="Arial" pitchFamily="34" charset="-120"/>
+              </a:rPr>
+              <a:t>Os Maias</a:t>
+            </a:r>
+            <a:pPr indent="0" marL="0">
+              <a:lnSpc>
+                <a:spcPct val="105000"/>
+              </a:lnSpc>
+              <a:buNone/>
+            </a:pPr>
+            <a:r>
+              <a:rPr lang="en-US" sz="2200" dirty="0">
+                <a:solidFill>
+                  <a:srgbClr val="F2F0EA"/>
+                </a:solidFill>
+                <a:latin typeface="Arial" pitchFamily="34" charset="0"/>
+                <a:ea typeface="Arial" pitchFamily="34" charset="-122"/>
+                <a:cs typeface="Arial" pitchFamily="34" charset="-120"/>
+              </a:rPr>
+              <a:t>, a ironia desmonta a paixão, Afonso morre e Carlos e Ega concluem «Falhámos a vida».</a:t>
             </a:r>
             <a:endParaRPr lang="en-US" sz="2200" dirty="0"/>
           </a:p>
